--- a/examples/repositories/marp-mcp-showcase/deck.pptx
+++ b/examples/repositories/marp-mcp-showcase/deck.pptx
@@ -507,7 +507,7 @@
           <a:p>
             <a:r>
               <a:rPr lang="en-US" dirty="0"/>
-              <a:t>slide-id: b43985c5-b8a2-409a-a8a5-d23a803fc778</a:t>
+              <a:t>slide-id: 6eab75b8-400d-463b-b8ff-bac1d363d691</a:t>
             </a:r>
             <a:endParaRPr lang="en-US" dirty="0"/>
           </a:p>
@@ -595,7 +595,7 @@
           <a:p>
             <a:r>
               <a:rPr lang="en-US" dirty="0"/>
-              <a:t>slide-id: 137a2953-b510-42b1-a8d3-336041700c4f
+              <a:t>slide-id: bb37fa6e-4c5f-4251-992a-3abad125981f
 架空の企画案。具体的な道具・材料の適合は運営側で確認する。参加者に技法手順を指示する資料ではない。</a:t>
             </a:r>
             <a:endParaRPr lang="en-US" dirty="0"/>
@@ -684,7 +684,7 @@
           <a:p>
             <a:r>
               <a:rPr lang="en-US" dirty="0"/>
-              <a:t>slide-id: 56786240-77d5-45e7-aaed-caf4862cad98
+              <a:t>slide-id: 941a5484-4052-4c0e-b730-7713a5d5247d
 時間は仮の企画設定で、実測ではない。修理の完成や効果を保証する内容ではない。</a:t>
             </a:r>
             <a:endParaRPr lang="en-US" dirty="0"/>
@@ -773,7 +773,7 @@
           <a:p>
             <a:r>
               <a:rPr lang="en-US" dirty="0"/>
-              <a:t>slide-id: 897cb8e7-b4e8-4468-b557-ec22871dcf96
+              <a:t>slide-id: 3c5194ee-6f93-43ce-806a-68c9fae40fb8
 実在の人名・会社・運営実績は示していない。役割の仮案。</a:t>
             </a:r>
             <a:endParaRPr lang="en-US" dirty="0"/>
@@ -862,7 +862,7 @@
           <a:p>
             <a:r>
               <a:rPr lang="en-US" dirty="0"/>
-              <a:t>slide-id: d5b2ab3d-20a1-478c-bcea-676c19f77f8c
+              <a:t>slide-id: feeac38f-9c8c-4bf8-ab18-0874dd54fc44
 持ち帰る内容の企画案。完成・効果の実績ではない。</a:t>
             </a:r>
             <a:endParaRPr lang="en-US" dirty="0"/>
@@ -951,7 +951,7 @@
           <a:p>
             <a:r>
               <a:rPr lang="en-US" dirty="0"/>
-              <a:t>slide-id: 9d4ba204-3b15-457a-8e95-423e8592739d
+              <a:t>slide-id: c7ece041-3574-4c26-ba4a-6b3f261340d5
 架空の衣服お直しワークショップ企画。開催・効果・売上の実績はない。</a:t>
             </a:r>
             <a:endParaRPr lang="en-US" dirty="0"/>
